--- a/API/L01-1-Intro/API-Notes.pptx
+++ b/API/L01-1-Intro/API-Notes.pptx
@@ -222,7 +222,7 @@
           <a:p>
             <a:fld id="{7BAEECA8-D063-486F-AE31-5020270C1449}" type="datetimeFigureOut">
               <a:rPr lang="en-US" smtClean="0"/>
-              <a:t>3/23/2026</a:t>
+              <a:t>6/3/2026</a:t>
             </a:fld>
             <a:endParaRPr lang="en-US"/>
           </a:p>
@@ -687,7 +687,7 @@
           <a:p>
             <a:fld id="{E0F4871E-3672-42BE-BBA1-0BAFEE555536}" type="datetimeFigureOut">
               <a:rPr lang="en-US" smtClean="0"/>
-              <a:t>3/23/2026</a:t>
+              <a:t>6/3/2026</a:t>
             </a:fld>
             <a:endParaRPr lang="en-US"/>
           </a:p>
@@ -1101,7 +1101,7 @@
           <a:p>
             <a:fld id="{6383FAE1-13DE-4511-8C1B-C8AFB720664C}" type="datetimeFigureOut">
               <a:rPr lang="en-US" smtClean="0"/>
-              <a:t>3/23/2026</a:t>
+              <a:t>6/3/2026</a:t>
             </a:fld>
             <a:endParaRPr lang="en-US"/>
           </a:p>
@@ -1299,7 +1299,7 @@
           <a:p>
             <a:fld id="{6383FAE1-13DE-4511-8C1B-C8AFB720664C}" type="datetimeFigureOut">
               <a:rPr lang="en-US" smtClean="0"/>
-              <a:t>3/23/2026</a:t>
+              <a:t>6/3/2026</a:t>
             </a:fld>
             <a:endParaRPr lang="en-US"/>
           </a:p>
@@ -1507,7 +1507,7 @@
           <a:p>
             <a:fld id="{6383FAE1-13DE-4511-8C1B-C8AFB720664C}" type="datetimeFigureOut">
               <a:rPr lang="en-US" smtClean="0"/>
-              <a:t>3/23/2026</a:t>
+              <a:t>6/3/2026</a:t>
             </a:fld>
             <a:endParaRPr lang="en-US"/>
           </a:p>
@@ -1705,7 +1705,7 @@
           <a:p>
             <a:fld id="{6383FAE1-13DE-4511-8C1B-C8AFB720664C}" type="datetimeFigureOut">
               <a:rPr lang="en-US" smtClean="0"/>
-              <a:t>3/23/2026</a:t>
+              <a:t>6/3/2026</a:t>
             </a:fld>
             <a:endParaRPr lang="en-US"/>
           </a:p>
@@ -1980,7 +1980,7 @@
           <a:p>
             <a:fld id="{6383FAE1-13DE-4511-8C1B-C8AFB720664C}" type="datetimeFigureOut">
               <a:rPr lang="en-US" smtClean="0"/>
-              <a:t>3/23/2026</a:t>
+              <a:t>6/3/2026</a:t>
             </a:fld>
             <a:endParaRPr lang="en-US"/>
           </a:p>
@@ -2245,7 +2245,7 @@
           <a:p>
             <a:fld id="{6383FAE1-13DE-4511-8C1B-C8AFB720664C}" type="datetimeFigureOut">
               <a:rPr lang="en-US" smtClean="0"/>
-              <a:t>3/23/2026</a:t>
+              <a:t>6/3/2026</a:t>
             </a:fld>
             <a:endParaRPr lang="en-US"/>
           </a:p>
@@ -2657,7 +2657,7 @@
           <a:p>
             <a:fld id="{6383FAE1-13DE-4511-8C1B-C8AFB720664C}" type="datetimeFigureOut">
               <a:rPr lang="en-US" smtClean="0"/>
-              <a:t>3/23/2026</a:t>
+              <a:t>6/3/2026</a:t>
             </a:fld>
             <a:endParaRPr lang="en-US"/>
           </a:p>
@@ -2798,7 +2798,7 @@
           <a:p>
             <a:fld id="{6383FAE1-13DE-4511-8C1B-C8AFB720664C}" type="datetimeFigureOut">
               <a:rPr lang="en-US" smtClean="0"/>
-              <a:t>3/23/2026</a:t>
+              <a:t>6/3/2026</a:t>
             </a:fld>
             <a:endParaRPr lang="en-US"/>
           </a:p>
@@ -2911,7 +2911,7 @@
           <a:p>
             <a:fld id="{6383FAE1-13DE-4511-8C1B-C8AFB720664C}" type="datetimeFigureOut">
               <a:rPr lang="en-US" smtClean="0"/>
-              <a:t>3/23/2026</a:t>
+              <a:t>6/3/2026</a:t>
             </a:fld>
             <a:endParaRPr lang="en-US"/>
           </a:p>
@@ -3222,7 +3222,7 @@
           <a:p>
             <a:fld id="{6383FAE1-13DE-4511-8C1B-C8AFB720664C}" type="datetimeFigureOut">
               <a:rPr lang="en-US" smtClean="0"/>
-              <a:t>3/23/2026</a:t>
+              <a:t>6/3/2026</a:t>
             </a:fld>
             <a:endParaRPr lang="en-US"/>
           </a:p>
@@ -3513,7 +3513,7 @@
           <a:p>
             <a:fld id="{6383FAE1-13DE-4511-8C1B-C8AFB720664C}" type="datetimeFigureOut">
               <a:rPr lang="en-US" smtClean="0"/>
-              <a:t>3/23/2026</a:t>
+              <a:t>6/3/2026</a:t>
             </a:fld>
             <a:endParaRPr lang="en-US"/>
           </a:p>
@@ -3757,7 +3757,7 @@
           <a:p>
             <a:fld id="{6383FAE1-13DE-4511-8C1B-C8AFB720664C}" type="datetimeFigureOut">
               <a:rPr lang="en-US" smtClean="0"/>
-              <a:t>3/23/2026</a:t>
+              <a:t>6/3/2026</a:t>
             </a:fld>
             <a:endParaRPr lang="en-US"/>
           </a:p>
@@ -4970,27 +4970,8 @@
                   </a:schemeClr>
                 </a:solidFill>
               </a:rPr>
-              <a:t>HTTP Method (GET) -  Or POST, </a:t>
-            </a:r>
-            <a:r>
-              <a:rPr lang="en-US" sz="2400" dirty="0" err="1">
-                <a:solidFill>
-                  <a:schemeClr val="accent6">
-                    <a:lumMod val="60000"/>
-                    <a:lumOff val="40000"/>
-                  </a:schemeClr>
-                </a:solidFill>
-              </a:rPr>
-              <a:t>etc</a:t>
-            </a:r>
-            <a:endParaRPr lang="en-US" sz="2400" dirty="0">
-              <a:solidFill>
-                <a:schemeClr val="accent6">
-                  <a:lumMod val="60000"/>
-                  <a:lumOff val="40000"/>
-                </a:schemeClr>
-              </a:solidFill>
-            </a:endParaRPr>
+              <a:t>HTTP Method (GET) -  Or POST, etc.</a:t>
+            </a:r>
           </a:p>
           <a:p>
             <a:pPr marL="342900" indent="-342900">
